--- a/Презентация по RL.pptx
+++ b/Презентация по RL.pptx
@@ -310,7 +310,7 @@
           <a:p>
             <a:fld id="{5BCAD085-E8A6-8845-BD4E-CB4CCA059FC4}" type="datetimeFigureOut">
               <a:rPr lang="en-US" smtClean="0"/>
-              <a:t>10/13/2026</a:t>
+              <a:t>10/14/2026</a:t>
             </a:fld>
             <a:endParaRPr lang="en-US"/>
           </a:p>
@@ -478,7 +478,7 @@
           <a:p>
             <a:fld id="{5BCAD085-E8A6-8845-BD4E-CB4CCA059FC4}" type="datetimeFigureOut">
               <a:rPr lang="en-US" smtClean="0"/>
-              <a:t>10/13/2026</a:t>
+              <a:t>10/14/2026</a:t>
             </a:fld>
             <a:endParaRPr lang="en-US"/>
           </a:p>
@@ -656,7 +656,7 @@
           <a:p>
             <a:fld id="{5BCAD085-E8A6-8845-BD4E-CB4CCA059FC4}" type="datetimeFigureOut">
               <a:rPr lang="en-US" smtClean="0"/>
-              <a:t>10/13/2026</a:t>
+              <a:t>10/14/2026</a:t>
             </a:fld>
             <a:endParaRPr lang="en-US"/>
           </a:p>
@@ -824,7 +824,7 @@
           <a:p>
             <a:fld id="{5BCAD085-E8A6-8845-BD4E-CB4CCA059FC4}" type="datetimeFigureOut">
               <a:rPr lang="en-US" smtClean="0"/>
-              <a:t>10/13/2026</a:t>
+              <a:t>10/14/2026</a:t>
             </a:fld>
             <a:endParaRPr lang="en-US"/>
           </a:p>
@@ -1069,7 +1069,7 @@
           <a:p>
             <a:fld id="{5BCAD085-E8A6-8845-BD4E-CB4CCA059FC4}" type="datetimeFigureOut">
               <a:rPr lang="en-US" smtClean="0"/>
-              <a:t>10/13/2026</a:t>
+              <a:t>10/14/2026</a:t>
             </a:fld>
             <a:endParaRPr lang="en-US"/>
           </a:p>
@@ -1354,7 +1354,7 @@
           <a:p>
             <a:fld id="{5BCAD085-E8A6-8845-BD4E-CB4CCA059FC4}" type="datetimeFigureOut">
               <a:rPr lang="en-US" smtClean="0"/>
-              <a:t>10/13/2026</a:t>
+              <a:t>10/14/2026</a:t>
             </a:fld>
             <a:endParaRPr lang="en-US"/>
           </a:p>
@@ -1773,7 +1773,7 @@
           <a:p>
             <a:fld id="{5BCAD085-E8A6-8845-BD4E-CB4CCA059FC4}" type="datetimeFigureOut">
               <a:rPr lang="en-US" smtClean="0"/>
-              <a:t>10/13/2026</a:t>
+              <a:t>10/14/2026</a:t>
             </a:fld>
             <a:endParaRPr lang="en-US"/>
           </a:p>
@@ -1890,7 +1890,7 @@
           <a:p>
             <a:fld id="{5BCAD085-E8A6-8845-BD4E-CB4CCA059FC4}" type="datetimeFigureOut">
               <a:rPr lang="en-US" smtClean="0"/>
-              <a:t>10/13/2026</a:t>
+              <a:t>10/14/2026</a:t>
             </a:fld>
             <a:endParaRPr lang="en-US"/>
           </a:p>
@@ -1985,7 +1985,7 @@
           <a:p>
             <a:fld id="{5BCAD085-E8A6-8845-BD4E-CB4CCA059FC4}" type="datetimeFigureOut">
               <a:rPr lang="en-US" smtClean="0"/>
-              <a:t>10/13/2026</a:t>
+              <a:t>10/14/2026</a:t>
             </a:fld>
             <a:endParaRPr lang="en-US"/>
           </a:p>
@@ -2260,7 +2260,7 @@
           <a:p>
             <a:fld id="{5BCAD085-E8A6-8845-BD4E-CB4CCA059FC4}" type="datetimeFigureOut">
               <a:rPr lang="en-US" smtClean="0"/>
-              <a:t>10/13/2026</a:t>
+              <a:t>10/14/2026</a:t>
             </a:fld>
             <a:endParaRPr lang="en-US"/>
           </a:p>
@@ -2512,7 +2512,7 @@
           <a:p>
             <a:fld id="{5BCAD085-E8A6-8845-BD4E-CB4CCA059FC4}" type="datetimeFigureOut">
               <a:rPr lang="en-US" smtClean="0"/>
-              <a:t>10/13/2026</a:t>
+              <a:t>10/14/2026</a:t>
             </a:fld>
             <a:endParaRPr lang="en-US"/>
           </a:p>
@@ -2723,7 +2723,7 @@
           <a:p>
             <a:fld id="{5BCAD085-E8A6-8845-BD4E-CB4CCA059FC4}" type="datetimeFigureOut">
               <a:rPr lang="en-US" smtClean="0"/>
-              <a:t>10/13/2026</a:t>
+              <a:t>10/14/2026</a:t>
             </a:fld>
             <a:endParaRPr lang="en-US"/>
           </a:p>
@@ -4463,7 +4463,7 @@
         <p:spPr>
           <a:xfrm>
             <a:off x="731520" y="457200"/>
-            <a:ext cx="1681871" cy="276999"/>
+            <a:ext cx="1899879" cy="276999"/>
           </a:xfrm>
           <a:prstGeom prst="rect">
             <a:avLst/>
@@ -4485,9 +4485,8 @@
             </a:pPr>
             <a:r>
               <a:rPr lang="ru-RU" dirty="0"/>
-              <a:t>Анализ и сбор данных</a:t>
-            </a:r>
-            <a:endParaRPr dirty="0"/>
+              <a:t>АНАЛИЗ И СБОР ДАННЫХ</a:t>
+            </a:r>
           </a:p>
         </p:txBody>
       </p:sp>
@@ -4667,7 +4666,7 @@
         <p:spPr>
           <a:xfrm>
             <a:off x="731520" y="457200"/>
-            <a:ext cx="1681871" cy="276999"/>
+            <a:ext cx="1899879" cy="276999"/>
           </a:xfrm>
           <a:prstGeom prst="rect">
             <a:avLst/>
@@ -4689,9 +4688,8 @@
             </a:pPr>
             <a:r>
               <a:rPr lang="ru-RU" dirty="0"/>
-              <a:t>Анализ и сбор данных</a:t>
-            </a:r>
-            <a:endParaRPr dirty="0"/>
+              <a:t>АНАЛИЗ И СБОР ДАННЫХ</a:t>
+            </a:r>
           </a:p>
         </p:txBody>
       </p:sp>
@@ -4738,6 +4736,36 @@
           </a:p>
         </p:txBody>
       </p:sp>
+      <p:pic>
+        <p:nvPicPr>
+          <p:cNvPr id="7" name="Рисунок 6">
+            <a:extLst>
+              <a:ext uri="{FF2B5EF4-FFF2-40B4-BE49-F238E27FC236}">
+                <a16:creationId xmlns:a16="http://schemas.microsoft.com/office/drawing/2014/main" id="{66ECF994-3962-0ED5-7C8A-F70824D7C77D}"/>
+              </a:ext>
+            </a:extLst>
+          </p:cNvPr>
+          <p:cNvPicPr>
+            <a:picLocks noChangeAspect="1"/>
+          </p:cNvPicPr>
+          <p:nvPr/>
+        </p:nvPicPr>
+        <p:blipFill>
+          <a:blip r:embed="rId2"/>
+          <a:stretch>
+            <a:fillRect/>
+          </a:stretch>
+        </p:blipFill>
+        <p:spPr>
+          <a:xfrm>
+            <a:off x="0" y="1743234"/>
+            <a:ext cx="12192000" cy="3371531"/>
+          </a:xfrm>
+          <a:prstGeom prst="rect">
+            <a:avLst/>
+          </a:prstGeom>
+        </p:spPr>
+      </p:pic>
     </p:spTree>
     <p:extLst>
       <p:ext uri="{BB962C8B-B14F-4D97-AF65-F5344CB8AC3E}">
